--- a/slides/pptx/week04.pptx
+++ b/slides/pptx/week04.pptx
@@ -617,7 +617,8 @@
           <a:p>
             <a:r>
               <a:rPr lang="en-US" dirty="0"/>
-              <a:t>The consolidation slide — leave it up while students work Task 1. It shows all three states at once (normal / injected / parameterised) with the token colours: blue = value/data, orange = attacker chars that became code, struck-through grey = the check that no longer runs. Point at the orange ' in row 2 — 'that one character is the whole bug' — then the ? in row 3 — 'the value can't reach the grammar'. Same picture the sqli-parse sim animates live. ~3 min.</a:t>
+              <a:t>The consolidation slide — leave it up while students work Task 1. It shows all three states at once (normal / injected / parameterised) with the token colours: blue = value/data, orange = attacker chars that became code, struck-through grey = the check that no longer runs. Point at the orange ' in row 2 — 'that one character is the whole bug' — then the ? in row 3 — 'the value can't reach the grammar'. Same picture the sqli-parse sim animates live. ~3 min.
+Diagram: Three SQL login queries stacked: normal input sits inside the string as data; the injected username alice'-- makes the user's quote close the string and -- comment out the password check so it logs in with no password; and the parameterised version binds alice'-- into a ? placeholder as pure data so the quote and dashes are inert and login fails.</a:t>
             </a:r>
             <a:endParaRPr lang="en-US" dirty="0"/>
           </a:p>
@@ -1585,7 +1586,8 @@
           <a:p>
             <a:r>
               <a:rPr lang="en-US" dirty="0"/>
-              <a:t>Synthesis slide — the SAME untrusted value from request.args/request.files is what feeds all three attacks just covered. Land on the closing line: escaping quotes does nothing to a semicolon in a shell, and a safe filename does nothing to SQL. Sets up "Defenses" as three separate fixes, not one. ~4 min.</a:t>
+              <a:t>Synthesis slide — the SAME untrusted value from request.args/request.files is what feeds all three attacks just covered. Land on the closing line: escaping quotes does nothing to a semicolon in a shell, and a safe filename does nothing to SQL. Sets up "Defenses" as three separate fixes, not one. ~4 min.
+Diagram: One untrusted request value reaches three different interpreters — SQL (CWE-89, fixed by a parameterized query), the OS shell (CWE-78, fixed by an argument vector with shell=False), and a filesystem write (CWE-434, fixed by an extension allow-list). One input filter cannot guard three grammars — the fix belongs at the sink that parses the value, not at the source.</a:t>
             </a:r>
             <a:endParaRPr lang="en-US" dirty="0"/>
           </a:p>
@@ -1673,7 +1675,8 @@
           <a:p>
             <a:r>
               <a:rPr lang="en-US" dirty="0"/>
-              <a:t>Synthesis slide — the SAME untrusted value from request.args/request.files is what feeds all three attacks just covered. Land on the closing line: escaping quotes does nothing to a semicolon in a shell, and a safe filename does nothing to SQL. Sets up "Defenses" as three separate fixes, not one. ~4 min.</a:t>
+              <a:t>Synthesis slide — the SAME untrusted value from request.args/request.files is what feeds all three attacks just covered. Land on the closing line: escaping quotes does nothing to a semicolon in a shell, and a safe filename does nothing to SQL. Sets up "Defenses" as three separate fixes, not one. ~4 min.
+Diagram: One untrusted request value reaches three different interpreters — SQL (CWE-89, fixed by a parameterized query), the OS shell (CWE-78, fixed by an argument vector with shell=False), and a filesystem write (CWE-434, fixed by an extension allow-list). One input filter cannot guard three grammars — the fix belongs at the sink that parses the value, not at the source.</a:t>
             </a:r>
             <a:endParaRPr lang="en-US" dirty="0"/>
           </a:p>
@@ -3280,7 +3283,7 @@
       </p:grpSpPr>
       <p:pic>
         <p:nvPicPr>
-          <p:cNvPr id="2" name="Image 0" descr="/private/tmp/claude-501/-Users-pop7-Library-CloudStorage-OneDrive-MonsterConnectCo--Ltd-Lecture-KOSEN69---software-security/e6d6556f-17de-403d-a9a0-cf2f846149b4/scratchpad/pptx2/src/slides/pptx/assets/logo-small.png">    </p:cNvPr>
+          <p:cNvPr id="2" name="Image 0" descr="/private/tmp/claude-501/-Users-pop7-Library-CloudStorage-OneDrive-MonsterConnectCo--Ltd-Lecture-KOSEN69---software-security/e6d6556f-17de-403d-a9a0-cf2f846149b4/scratchpad/tree/slides/pptx/assets/logo-small.png">    </p:cNvPr>
           <p:cNvPicPr>
             <a:picLocks noChangeAspect="1"/>
           </p:cNvPicPr>
@@ -3544,16 +3547,40 @@
           </a:p>
         </p:txBody>
       </p:sp>
-      <p:sp>
-        <p:nvSpPr>
-          <p:cNvPr id="5" name="Text 2"/>
-          <p:cNvSpPr/>
-          <p:nvPr/>
-        </p:nvSpPr>
-        <p:spPr>
-          <a:xfrm>
-            <a:off x="548640" y="1325880"/>
-            <a:ext cx="8046720" cy="1645920"/>
+      <p:pic>
+        <p:nvPicPr>
+          <p:cNvPr id="5" name="Image 1" descr="Three SQL login queries stacked: normal input sits inside the string as data; the injected username alice'-- makes the user's quote close the string and -- comment out the password check so it logs in with no password; and the parameterised version binds alice'-- into a ? placeholder as pure data so the quote and dashes are inert and login fails.">    </p:cNvPr>
+          <p:cNvPicPr>
+            <a:picLocks noChangeAspect="1"/>
+          </p:cNvPicPr>
+          <p:nvPr/>
+        </p:nvPicPr>
+        <p:blipFill>
+          <a:blip r:embed="rId2"/>
+          <a:stretch>
+            <a:fillRect/>
+          </a:stretch>
+        </p:blipFill>
+        <p:spPr>
+          <a:xfrm>
+            <a:off x="2062828" y="1097280"/>
+            <a:ext cx="5018343" cy="3566160"/>
+          </a:xfrm>
+          <a:prstGeom prst="rect">
+            <a:avLst/>
+          </a:prstGeom>
+        </p:spPr>
+      </p:pic>
+      <p:sp>
+        <p:nvSpPr>
+          <p:cNvPr id="6" name="Text 2"/>
+          <p:cNvSpPr/>
+          <p:nvPr/>
+        </p:nvSpPr>
+        <p:spPr>
+          <a:xfrm>
+            <a:off x="457200" y="4800600"/>
+            <a:ext cx="6949440" cy="274320"/>
           </a:xfrm>
           <a:prstGeom prst="rect">
             <a:avLst/>
@@ -3562,62 +3589,21 @@
           <a:ln/>
         </p:spPr>
         <p:txBody>
-          <a:bodyPr wrap="square" lIns="0" tIns="0" rIns="0" bIns="0" rtlCol="0" anchor="t">
-            <a:normAutofit/>
-          </a:bodyPr>
+          <a:bodyPr wrap="square" lIns="0" tIns="0" rIns="0" bIns="0" rtlCol="0" anchor="ctr"/>
           <a:lstStyle/>
           <a:p>
             <a:pPr indent="0" marL="0">
               <a:buNone/>
             </a:pPr>
             <a:r>
-              <a:rPr lang="en-US" sz="1400" dirty="0">
-                <a:solidFill>
-                  <a:srgbClr val="1F2937"/>
+              <a:rPr lang="en-US" sz="900" dirty="0">
+                <a:solidFill>
+                  <a:srgbClr val="64748B"/>
                 </a:solidFill>
                 <a:latin typeface="Calibri" pitchFamily="34" charset="0"/>
                 <a:ea typeface="Calibri" pitchFamily="34" charset="-122"/>
                 <a:cs typeface="Calibri" pitchFamily="34" charset="-120"/>
               </a:rPr>
-              <a:t>See diagram: Three SQL login queries stacked: normal input sits inside the string as data; the injected username alice'-- makes the user's quote close the string and -- comment out the password check so it logs in with no password; and the parameterised version binds alice'-- into a ? placeholder as pure data so the quote and dashes are inert and login fails. (web only)</a:t>
-            </a:r>
-            <a:endParaRPr lang="en-US" sz="1400" dirty="0"/>
-          </a:p>
-        </p:txBody>
-      </p:sp>
-      <p:sp>
-        <p:nvSpPr>
-          <p:cNvPr id="6" name="Text 3"/>
-          <p:cNvSpPr/>
-          <p:nvPr/>
-        </p:nvSpPr>
-        <p:spPr>
-          <a:xfrm>
-            <a:off x="457200" y="4800600"/>
-            <a:ext cx="6949440" cy="274320"/>
-          </a:xfrm>
-          <a:prstGeom prst="rect">
-            <a:avLst/>
-          </a:prstGeom>
-          <a:noFill/>
-          <a:ln/>
-        </p:spPr>
-        <p:txBody>
-          <a:bodyPr wrap="square" lIns="0" tIns="0" rIns="0" bIns="0" rtlCol="0" anchor="ctr"/>
-          <a:lstStyle/>
-          <a:p>
-            <a:pPr indent="0" marL="0">
-              <a:buNone/>
-            </a:pPr>
-            <a:r>
-              <a:rPr lang="en-US" sz="900" dirty="0">
-                <a:solidFill>
-                  <a:srgbClr val="64748B"/>
-                </a:solidFill>
-                <a:latin typeface="Calibri" pitchFamily="34" charset="0"/>
-                <a:ea typeface="Calibri" pitchFamily="34" charset="-122"/>
-                <a:cs typeface="Calibri" pitchFamily="34" charset="-120"/>
-              </a:rPr>
               <a:t>Software Security · Week 4</a:t>
             </a:r>
             <a:endParaRPr lang="en-US" sz="900" dirty="0"/>
@@ -3626,14 +3612,14 @@
       </p:sp>
       <p:pic>
         <p:nvPicPr>
-          <p:cNvPr id="7" name="Image 1" descr="/private/tmp/claude-501/-Users-pop7-Library-CloudStorage-OneDrive-MonsterConnectCo--Ltd-Lecture-KOSEN69---software-security/e6d6556f-17de-403d-a9a0-cf2f846149b4/scratchpad/pptx2/src/slides/pptx/assets/logo-small.png">    </p:cNvPr>
+          <p:cNvPr id="7" name="Image 2" descr="/private/tmp/claude-501/-Users-pop7-Library-CloudStorage-OneDrive-MonsterConnectCo--Ltd-Lecture-KOSEN69---software-security/e6d6556f-17de-403d-a9a0-cf2f846149b4/scratchpad/tree/slides/pptx/assets/logo-small.png">    </p:cNvPr>
           <p:cNvPicPr>
             <a:picLocks noChangeAspect="1"/>
           </p:cNvPicPr>
           <p:nvPr/>
         </p:nvPicPr>
         <p:blipFill>
-          <a:blip r:embed="rId2"/>
+          <a:blip r:embed="rId3"/>
           <a:stretch>
             <a:fillRect/>
           </a:stretch>
@@ -3948,7 +3934,7 @@
       </p:sp>
       <p:pic>
         <p:nvPicPr>
-          <p:cNvPr id="8" name="Image 1" descr="/private/tmp/claude-501/-Users-pop7-Library-CloudStorage-OneDrive-MonsterConnectCo--Ltd-Lecture-KOSEN69---software-security/e6d6556f-17de-403d-a9a0-cf2f846149b4/scratchpad/pptx2/src/slides/pptx/assets/logo-small.png">    </p:cNvPr>
+          <p:cNvPr id="8" name="Image 1" descr="/private/tmp/claude-501/-Users-pop7-Library-CloudStorage-OneDrive-MonsterConnectCo--Ltd-Lecture-KOSEN69---software-security/e6d6556f-17de-403d-a9a0-cf2f846149b4/scratchpad/tree/slides/pptx/assets/logo-small.png">    </p:cNvPr>
           <p:cNvPicPr>
             <a:picLocks noChangeAspect="1"/>
           </p:cNvPicPr>
@@ -4270,7 +4256,7 @@
       </p:sp>
       <p:pic>
         <p:nvPicPr>
-          <p:cNvPr id="8" name="Image 1" descr="/private/tmp/claude-501/-Users-pop7-Library-CloudStorage-OneDrive-MonsterConnectCo--Ltd-Lecture-KOSEN69---software-security/e6d6556f-17de-403d-a9a0-cf2f846149b4/scratchpad/pptx2/src/slides/pptx/assets/logo-small.png">    </p:cNvPr>
+          <p:cNvPr id="8" name="Image 1" descr="/private/tmp/claude-501/-Users-pop7-Library-CloudStorage-OneDrive-MonsterConnectCo--Ltd-Lecture-KOSEN69---software-security/e6d6556f-17de-403d-a9a0-cf2f846149b4/scratchpad/tree/slides/pptx/assets/logo-small.png">    </p:cNvPr>
           <p:cNvPicPr>
             <a:picLocks noChangeAspect="1"/>
           </p:cNvPicPr>
@@ -4592,7 +4578,7 @@
       </p:sp>
       <p:pic>
         <p:nvPicPr>
-          <p:cNvPr id="8" name="Image 1" descr="/private/tmp/claude-501/-Users-pop7-Library-CloudStorage-OneDrive-MonsterConnectCo--Ltd-Lecture-KOSEN69---software-security/e6d6556f-17de-403d-a9a0-cf2f846149b4/scratchpad/pptx2/src/slides/pptx/assets/logo-small.png">    </p:cNvPr>
+          <p:cNvPr id="8" name="Image 1" descr="/private/tmp/claude-501/-Users-pop7-Library-CloudStorage-OneDrive-MonsterConnectCo--Ltd-Lecture-KOSEN69---software-security/e6d6556f-17de-403d-a9a0-cf2f846149b4/scratchpad/tree/slides/pptx/assets/logo-small.png">    </p:cNvPr>
           <p:cNvPicPr>
             <a:picLocks noChangeAspect="1"/>
           </p:cNvPicPr>
@@ -4957,7 +4943,7 @@
       </p:sp>
       <p:pic>
         <p:nvPicPr>
-          <p:cNvPr id="10" name="Image 1" descr="/private/tmp/claude-501/-Users-pop7-Library-CloudStorage-OneDrive-MonsterConnectCo--Ltd-Lecture-KOSEN69---software-security/e6d6556f-17de-403d-a9a0-cf2f846149b4/scratchpad/pptx2/src/slides/pptx/assets/logo-small.png">    </p:cNvPr>
+          <p:cNvPr id="10" name="Image 1" descr="/private/tmp/claude-501/-Users-pop7-Library-CloudStorage-OneDrive-MonsterConnectCo--Ltd-Lecture-KOSEN69---software-security/e6d6556f-17de-403d-a9a0-cf2f846149b4/scratchpad/tree/slides/pptx/assets/logo-small.png">    </p:cNvPr>
           <p:cNvPicPr>
             <a:picLocks noChangeAspect="1"/>
           </p:cNvPicPr>
@@ -5383,7 +5369,7 @@
       </p:sp>
       <p:pic>
         <p:nvPicPr>
-          <p:cNvPr id="10" name="Image 1" descr="/private/tmp/claude-501/-Users-pop7-Library-CloudStorage-OneDrive-MonsterConnectCo--Ltd-Lecture-KOSEN69---software-security/e6d6556f-17de-403d-a9a0-cf2f846149b4/scratchpad/pptx2/src/slides/pptx/assets/logo-small.png">    </p:cNvPr>
+          <p:cNvPr id="10" name="Image 1" descr="/private/tmp/claude-501/-Users-pop7-Library-CloudStorage-OneDrive-MonsterConnectCo--Ltd-Lecture-KOSEN69---software-security/e6d6556f-17de-403d-a9a0-cf2f846149b4/scratchpad/tree/slides/pptx/assets/logo-small.png">    </p:cNvPr>
           <p:cNvPicPr>
             <a:picLocks noChangeAspect="1"/>
           </p:cNvPicPr>
@@ -5772,7 +5758,7 @@
       </p:sp>
       <p:pic>
         <p:nvPicPr>
-          <p:cNvPr id="11" name="Image 1" descr="/private/tmp/claude-501/-Users-pop7-Library-CloudStorage-OneDrive-MonsterConnectCo--Ltd-Lecture-KOSEN69---software-security/e6d6556f-17de-403d-a9a0-cf2f846149b4/scratchpad/pptx2/src/slides/pptx/assets/logo-small.png">    </p:cNvPr>
+          <p:cNvPr id="11" name="Image 1" descr="/private/tmp/claude-501/-Users-pop7-Library-CloudStorage-OneDrive-MonsterConnectCo--Ltd-Lecture-KOSEN69---software-security/e6d6556f-17de-403d-a9a0-cf2f846149b4/scratchpad/tree/slides/pptx/assets/logo-small.png">    </p:cNvPr>
           <p:cNvPicPr>
             <a:picLocks noChangeAspect="1"/>
           </p:cNvPicPr>
@@ -6031,7 +6017,7 @@
       </p:sp>
       <p:pic>
         <p:nvPicPr>
-          <p:cNvPr id="8" name="Image 1" descr="/private/tmp/claude-501/-Users-pop7-Library-CloudStorage-OneDrive-MonsterConnectCo--Ltd-Lecture-KOSEN69---software-security/e6d6556f-17de-403d-a9a0-cf2f846149b4/scratchpad/pptx2/src/slides/pptx/assets/logo-small.png">    </p:cNvPr>
+          <p:cNvPr id="8" name="Image 1" descr="/private/tmp/claude-501/-Users-pop7-Library-CloudStorage-OneDrive-MonsterConnectCo--Ltd-Lecture-KOSEN69---software-security/e6d6556f-17de-403d-a9a0-cf2f846149b4/scratchpad/tree/slides/pptx/assets/logo-small.png">    </p:cNvPr>
           <p:cNvPicPr>
             <a:picLocks noChangeAspect="1"/>
           </p:cNvPicPr>
@@ -6332,7 +6318,7 @@
       </p:sp>
       <p:pic>
         <p:nvPicPr>
-          <p:cNvPr id="8" name="Image 1" descr="/private/tmp/claude-501/-Users-pop7-Library-CloudStorage-OneDrive-MonsterConnectCo--Ltd-Lecture-KOSEN69---software-security/e6d6556f-17de-403d-a9a0-cf2f846149b4/scratchpad/pptx2/src/slides/pptx/assets/logo-small.png">    </p:cNvPr>
+          <p:cNvPr id="8" name="Image 1" descr="/private/tmp/claude-501/-Users-pop7-Library-CloudStorage-OneDrive-MonsterConnectCo--Ltd-Lecture-KOSEN69---software-security/e6d6556f-17de-403d-a9a0-cf2f846149b4/scratchpad/tree/slides/pptx/assets/logo-small.png">    </p:cNvPr>
           <p:cNvPicPr>
             <a:picLocks noChangeAspect="1"/>
           </p:cNvPicPr>
@@ -6675,7 +6661,7 @@
       </p:sp>
       <p:pic>
         <p:nvPicPr>
-          <p:cNvPr id="8" name="Image 1" descr="/private/tmp/claude-501/-Users-pop7-Library-CloudStorage-OneDrive-MonsterConnectCo--Ltd-Lecture-KOSEN69---software-security/e6d6556f-17de-403d-a9a0-cf2f846149b4/scratchpad/pptx2/src/slides/pptx/assets/logo-small.png">    </p:cNvPr>
+          <p:cNvPr id="8" name="Image 1" descr="/private/tmp/claude-501/-Users-pop7-Library-CloudStorage-OneDrive-MonsterConnectCo--Ltd-Lecture-KOSEN69---software-security/e6d6556f-17de-403d-a9a0-cf2f846149b4/scratchpad/tree/slides/pptx/assets/logo-small.png">    </p:cNvPr>
           <p:cNvPicPr>
             <a:picLocks noChangeAspect="1"/>
           </p:cNvPicPr>
@@ -7039,7 +7025,7 @@
       </p:sp>
       <p:pic>
         <p:nvPicPr>
-          <p:cNvPr id="8" name="Image 1" descr="/private/tmp/claude-501/-Users-pop7-Library-CloudStorage-OneDrive-MonsterConnectCo--Ltd-Lecture-KOSEN69---software-security/e6d6556f-17de-403d-a9a0-cf2f846149b4/scratchpad/pptx2/src/slides/pptx/assets/logo-small.png">    </p:cNvPr>
+          <p:cNvPr id="8" name="Image 1" descr="/private/tmp/claude-501/-Users-pop7-Library-CloudStorage-OneDrive-MonsterConnectCo--Ltd-Lecture-KOSEN69---software-security/e6d6556f-17de-403d-a9a0-cf2f846149b4/scratchpad/tree/slides/pptx/assets/logo-small.png">    </p:cNvPr>
           <p:cNvPicPr>
             <a:picLocks noChangeAspect="1"/>
           </p:cNvPicPr>
@@ -7183,16 +7169,40 @@
           </a:p>
         </p:txBody>
       </p:sp>
-      <p:sp>
-        <p:nvSpPr>
-          <p:cNvPr id="5" name="Text 2"/>
-          <p:cNvSpPr/>
-          <p:nvPr/>
-        </p:nvSpPr>
-        <p:spPr>
-          <a:xfrm>
-            <a:off x="548640" y="1325880"/>
-            <a:ext cx="8046720" cy="1645920"/>
+      <p:pic>
+        <p:nvPicPr>
+          <p:cNvPr id="5" name="Image 1" descr="One untrusted request value reaches three different interpreters — SQL (CWE-89, fixed by a parameterized query), the OS shell (CWE-78, fixed by an argument vector with shell=False), and a filesystem write (CWE-434, fixed by an extension allow-list). One input filter cannot guard three grammars — the fix belongs at the sink that parses the value, not at the source.">    </p:cNvPr>
+          <p:cNvPicPr>
+            <a:picLocks noChangeAspect="1"/>
+          </p:cNvPicPr>
+          <p:nvPr/>
+        </p:nvPicPr>
+        <p:blipFill>
+          <a:blip r:embed="rId2"/>
+          <a:stretch>
+            <a:fillRect/>
+          </a:stretch>
+        </p:blipFill>
+        <p:spPr>
+          <a:xfrm>
+            <a:off x="2004108" y="1097280"/>
+            <a:ext cx="5135784" cy="3566160"/>
+          </a:xfrm>
+          <a:prstGeom prst="rect">
+            <a:avLst/>
+          </a:prstGeom>
+        </p:spPr>
+      </p:pic>
+      <p:sp>
+        <p:nvSpPr>
+          <p:cNvPr id="6" name="Text 2"/>
+          <p:cNvSpPr/>
+          <p:nvPr/>
+        </p:nvSpPr>
+        <p:spPr>
+          <a:xfrm>
+            <a:off x="457200" y="4800600"/>
+            <a:ext cx="6949440" cy="274320"/>
           </a:xfrm>
           <a:prstGeom prst="rect">
             <a:avLst/>
@@ -7201,178 +7211,21 @@
           <a:ln/>
         </p:spPr>
         <p:txBody>
-          <a:bodyPr wrap="square" lIns="0" tIns="0" rIns="0" bIns="0" rtlCol="0" anchor="t">
-            <a:normAutofit/>
-          </a:bodyPr>
+          <a:bodyPr wrap="square" lIns="0" tIns="0" rIns="0" bIns="0" rtlCol="0" anchor="ctr"/>
           <a:lstStyle/>
           <a:p>
             <a:pPr indent="0" marL="0">
               <a:buNone/>
             </a:pPr>
             <a:r>
-              <a:rPr lang="en-US" sz="1400" dirty="0">
-                <a:solidFill>
-                  <a:srgbClr val="1F2937"/>
+              <a:rPr lang="en-US" sz="900" dirty="0">
+                <a:solidFill>
+                  <a:srgbClr val="64748B"/>
                 </a:solidFill>
                 <a:latin typeface="Calibri" pitchFamily="34" charset="0"/>
                 <a:ea typeface="Calibri" pitchFamily="34" charset="-122"/>
                 <a:cs typeface="Calibri" pitchFamily="34" charset="-120"/>
               </a:rPr>
-              <a:t>See diagram: One untrusted request value reaches three different interpreters — SQL (CWE-89, fixed by a parameterized query), the OS shell (CWE-78, fixed by an argument vector with shell=False), and a filesystem write (CWE-434, fixed by an extension allow-list). One input filter cannot guard three grammars — the fix belongs at the sink that parses the value, not at the source. (web only)</a:t>
-            </a:r>
-            <a:endParaRPr lang="en-US" sz="1400" dirty="0"/>
-          </a:p>
-        </p:txBody>
-      </p:sp>
-      <p:sp>
-        <p:nvSpPr>
-          <p:cNvPr id="6" name="Shape 3"/>
-          <p:cNvSpPr/>
-          <p:nvPr/>
-        </p:nvSpPr>
-        <p:spPr>
-          <a:xfrm>
-            <a:off x="457200" y="3063240"/>
-            <a:ext cx="8229600" cy="1207008"/>
-          </a:xfrm>
-          <a:prstGeom prst="roundRect">
-            <a:avLst>
-              <a:gd name="adj" fmla="val 6061"/>
-            </a:avLst>
-          </a:prstGeom>
-          <a:solidFill>
-            <a:srgbClr val="F1F5F9"/>
-          </a:solidFill>
-          <a:ln/>
-          <a:effectLst>
-            <a:outerShdw sx="100000" sy="100000" kx="0" ky="0" algn="bl" rotWithShape="0" blurRad="76200" dist="25400" dir="5400000">
-              <a:srgbClr val="000000">
-                <a:alpha val="12000"/>
-              </a:srgbClr>
-            </a:outerShdw>
-          </a:effectLst>
-        </p:spPr>
-      </p:sp>
-      <p:sp>
-        <p:nvSpPr>
-          <p:cNvPr id="7" name="Text 4"/>
-          <p:cNvSpPr/>
-          <p:nvPr/>
-        </p:nvSpPr>
-        <p:spPr>
-          <a:xfrm>
-            <a:off x="731520" y="3172968"/>
-            <a:ext cx="7680960" cy="987552"/>
-          </a:xfrm>
-          <a:prstGeom prst="rect">
-            <a:avLst/>
-          </a:prstGeom>
-          <a:noFill/>
-          <a:ln/>
-        </p:spPr>
-        <p:txBody>
-          <a:bodyPr wrap="square" lIns="0" tIns="0" rIns="0" bIns="0" rtlCol="0" anchor="t">
-            <a:normAutofit/>
-          </a:bodyPr>
-          <a:lstStyle/>
-          <a:p>
-            <a:pPr marL="342900" indent="-342900">
-              <a:spcAft>
-                <a:spcPts val="600"/>
-              </a:spcAft>
-              <a:buSzPct val="100000"/>
-              <a:buChar char="•"/>
-            </a:pPr>
-            <a:r>
-              <a:rPr lang="en-US" sz="1400" dirty="0">
-                <a:solidFill>
-                  <a:srgbClr val="1F2937"/>
-                </a:solidFill>
-                <a:latin typeface="Calibri" pitchFamily="34" charset="0"/>
-                <a:ea typeface="Calibri" pitchFamily="34" charset="-122"/>
-                <a:cs typeface="Calibri" pitchFamily="34" charset="-120"/>
-              </a:rPr>
-              <a:t>SQL (WHERE username = &lt;in&gt;) → parameterized query — bind the value</a:t>
-            </a:r>
-            <a:endParaRPr lang="en-US" sz="1400" dirty="0"/>
-          </a:p>
-          <a:p>
-            <a:pPr marL="342900" indent="-342900">
-              <a:spcAft>
-                <a:spcPts val="600"/>
-              </a:spcAft>
-              <a:buSzPct val="100000"/>
-              <a:buChar char="•"/>
-            </a:pPr>
-            <a:r>
-              <a:rPr lang="en-US" sz="1400" dirty="0">
-                <a:solidFill>
-                  <a:srgbClr val="1F2937"/>
-                </a:solidFill>
-                <a:latin typeface="Calibri" pitchFamily="34" charset="0"/>
-                <a:ea typeface="Calibri" pitchFamily="34" charset="-122"/>
-                <a:cs typeface="Calibri" pitchFamily="34" charset="-120"/>
-              </a:rPr>
-              <a:t>Shell (ping … &lt;in&gt;) → argument vector + shell=False — no shell to parse it</a:t>
-            </a:r>
-            <a:endParaRPr lang="en-US" sz="1400" dirty="0"/>
-          </a:p>
-          <a:p>
-            <a:pPr marL="342900" indent="-342900">
-              <a:spcAft>
-                <a:spcPts val="600"/>
-              </a:spcAft>
-              <a:buSzPct val="100000"/>
-              <a:buChar char="•"/>
-            </a:pPr>
-            <a:r>
-              <a:rPr lang="en-US" sz="1400" dirty="0">
-                <a:solidFill>
-                  <a:srgbClr val="1F2937"/>
-                </a:solidFill>
-                <a:latin typeface="Calibri" pitchFamily="34" charset="0"/>
-                <a:ea typeface="Calibri" pitchFamily="34" charset="-122"/>
-                <a:cs typeface="Calibri" pitchFamily="34" charset="-120"/>
-              </a:rPr>
-              <a:t>Filesystem (save(&lt;in&gt;)) → extension allow-list + store outside web root</a:t>
-            </a:r>
-            <a:endParaRPr lang="en-US" sz="1400" dirty="0"/>
-          </a:p>
-        </p:txBody>
-      </p:sp>
-      <p:sp>
-        <p:nvSpPr>
-          <p:cNvPr id="8" name="Text 5"/>
-          <p:cNvSpPr/>
-          <p:nvPr/>
-        </p:nvSpPr>
-        <p:spPr>
-          <a:xfrm>
-            <a:off x="457200" y="4800600"/>
-            <a:ext cx="6949440" cy="274320"/>
-          </a:xfrm>
-          <a:prstGeom prst="rect">
-            <a:avLst/>
-          </a:prstGeom>
-          <a:noFill/>
-          <a:ln/>
-        </p:spPr>
-        <p:txBody>
-          <a:bodyPr wrap="square" lIns="0" tIns="0" rIns="0" bIns="0" rtlCol="0" anchor="ctr"/>
-          <a:lstStyle/>
-          <a:p>
-            <a:pPr indent="0" marL="0">
-              <a:buNone/>
-            </a:pPr>
-            <a:r>
-              <a:rPr lang="en-US" sz="900" dirty="0">
-                <a:solidFill>
-                  <a:srgbClr val="64748B"/>
-                </a:solidFill>
-                <a:latin typeface="Calibri" pitchFamily="34" charset="0"/>
-                <a:ea typeface="Calibri" pitchFamily="34" charset="-122"/>
-                <a:cs typeface="Calibri" pitchFamily="34" charset="-120"/>
-              </a:rPr>
               <a:t>Software Security · Week 4</a:t>
             </a:r>
             <a:endParaRPr lang="en-US" sz="900" dirty="0"/>
@@ -7381,14 +7234,14 @@
       </p:sp>
       <p:pic>
         <p:nvPicPr>
-          <p:cNvPr id="9" name="Image 1" descr="/private/tmp/claude-501/-Users-pop7-Library-CloudStorage-OneDrive-MonsterConnectCo--Ltd-Lecture-KOSEN69---software-security/e6d6556f-17de-403d-a9a0-cf2f846149b4/scratchpad/pptx2/src/slides/pptx/assets/logo-small.png">    </p:cNvPr>
+          <p:cNvPr id="7" name="Image 2" descr="/private/tmp/claude-501/-Users-pop7-Library-CloudStorage-OneDrive-MonsterConnectCo--Ltd-Lecture-KOSEN69---software-security/e6d6556f-17de-403d-a9a0-cf2f846149b4/scratchpad/tree/slides/pptx/assets/logo-small.png">    </p:cNvPr>
           <p:cNvPicPr>
             <a:picLocks noChangeAspect="1"/>
           </p:cNvPicPr>
           <p:nvPr/>
         </p:nvPicPr>
         <p:blipFill>
-          <a:blip r:embed="rId2"/>
+          <a:blip r:embed="rId3"/>
           <a:stretch>
             <a:fillRect/>
           </a:stretch>
@@ -7534,11 +7387,11 @@
         <p:spPr>
           <a:xfrm>
             <a:off x="457200" y="1325880"/>
-            <a:ext cx="8229600" cy="585216"/>
+            <a:ext cx="8229600" cy="1517904"/>
           </a:xfrm>
           <a:prstGeom prst="roundRect">
             <a:avLst>
-              <a:gd name="adj" fmla="val 12500"/>
+              <a:gd name="adj" fmla="val 4819"/>
             </a:avLst>
           </a:prstGeom>
           <a:solidFill>
@@ -7563,7 +7416,7 @@
         <p:spPr>
           <a:xfrm>
             <a:off x="731520" y="1435608"/>
-            <a:ext cx="7680960" cy="365760"/>
+            <a:ext cx="7680960" cy="1298448"/>
           </a:xfrm>
           <a:prstGeom prst="rect">
             <a:avLst/>
@@ -7593,45 +7446,108 @@
                 <a:ea typeface="Calibri" pitchFamily="34" charset="-122"/>
                 <a:cs typeface="Calibri" pitchFamily="34" charset="-120"/>
               </a:rPr>
-              <a:t>One filter can't guard three grammars — fix at each sink, not at the source</a:t>
+              <a:t>SQL (WHERE username = &lt;in&gt;) → parameterized query — bind the value</a:t>
             </a:r>
             <a:endParaRPr lang="en-US" sz="1400" dirty="0"/>
           </a:p>
-        </p:txBody>
-      </p:sp>
-      <p:sp>
-        <p:nvSpPr>
-          <p:cNvPr id="7" name="Text 4"/>
-          <p:cNvSpPr/>
-          <p:nvPr/>
-        </p:nvSpPr>
-        <p:spPr>
-          <a:xfrm>
-            <a:off x="457200" y="4800600"/>
-            <a:ext cx="6949440" cy="274320"/>
-          </a:xfrm>
-          <a:prstGeom prst="rect">
-            <a:avLst/>
-          </a:prstGeom>
-          <a:noFill/>
-          <a:ln/>
-        </p:spPr>
-        <p:txBody>
-          <a:bodyPr wrap="square" lIns="0" tIns="0" rIns="0" bIns="0" rtlCol="0" anchor="ctr"/>
-          <a:lstStyle/>
-          <a:p>
-            <a:pPr indent="0" marL="0">
-              <a:buNone/>
-            </a:pPr>
-            <a:r>
-              <a:rPr lang="en-US" sz="900" dirty="0">
-                <a:solidFill>
-                  <a:srgbClr val="64748B"/>
+          <a:p>
+            <a:pPr marL="342900" indent="-342900">
+              <a:spcAft>
+                <a:spcPts val="600"/>
+              </a:spcAft>
+              <a:buSzPct val="100000"/>
+              <a:buChar char="•"/>
+            </a:pPr>
+            <a:r>
+              <a:rPr lang="en-US" sz="1400" dirty="0">
+                <a:solidFill>
+                  <a:srgbClr val="1F2937"/>
                 </a:solidFill>
                 <a:latin typeface="Calibri" pitchFamily="34" charset="0"/>
                 <a:ea typeface="Calibri" pitchFamily="34" charset="-122"/>
                 <a:cs typeface="Calibri" pitchFamily="34" charset="-120"/>
               </a:rPr>
+              <a:t>Shell (ping … &lt;in&gt;) → argument vector + shell=False — no shell to parse it</a:t>
+            </a:r>
+            <a:endParaRPr lang="en-US" sz="1400" dirty="0"/>
+          </a:p>
+          <a:p>
+            <a:pPr marL="342900" indent="-342900">
+              <a:spcAft>
+                <a:spcPts val="600"/>
+              </a:spcAft>
+              <a:buSzPct val="100000"/>
+              <a:buChar char="•"/>
+            </a:pPr>
+            <a:r>
+              <a:rPr lang="en-US" sz="1400" dirty="0">
+                <a:solidFill>
+                  <a:srgbClr val="1F2937"/>
+                </a:solidFill>
+                <a:latin typeface="Calibri" pitchFamily="34" charset="0"/>
+                <a:ea typeface="Calibri" pitchFamily="34" charset="-122"/>
+                <a:cs typeface="Calibri" pitchFamily="34" charset="-120"/>
+              </a:rPr>
+              <a:t>Filesystem (save(&lt;in&gt;)) → extension allow-list + store outside web root</a:t>
+            </a:r>
+            <a:endParaRPr lang="en-US" sz="1400" dirty="0"/>
+          </a:p>
+          <a:p>
+            <a:pPr marL="342900" indent="-342900">
+              <a:spcAft>
+                <a:spcPts val="600"/>
+              </a:spcAft>
+              <a:buSzPct val="100000"/>
+              <a:buChar char="•"/>
+            </a:pPr>
+            <a:r>
+              <a:rPr lang="en-US" sz="1400" dirty="0">
+                <a:solidFill>
+                  <a:srgbClr val="1F2937"/>
+                </a:solidFill>
+                <a:latin typeface="Calibri" pitchFamily="34" charset="0"/>
+                <a:ea typeface="Calibri" pitchFamily="34" charset="-122"/>
+                <a:cs typeface="Calibri" pitchFamily="34" charset="-120"/>
+              </a:rPr>
+              <a:t>One filter can't guard three grammars — fix at each sink, not at the source</a:t>
+            </a:r>
+            <a:endParaRPr lang="en-US" sz="1400" dirty="0"/>
+          </a:p>
+        </p:txBody>
+      </p:sp>
+      <p:sp>
+        <p:nvSpPr>
+          <p:cNvPr id="7" name="Text 4"/>
+          <p:cNvSpPr/>
+          <p:nvPr/>
+        </p:nvSpPr>
+        <p:spPr>
+          <a:xfrm>
+            <a:off x="457200" y="4800600"/>
+            <a:ext cx="6949440" cy="274320"/>
+          </a:xfrm>
+          <a:prstGeom prst="rect">
+            <a:avLst/>
+          </a:prstGeom>
+          <a:noFill/>
+          <a:ln/>
+        </p:spPr>
+        <p:txBody>
+          <a:bodyPr wrap="square" lIns="0" tIns="0" rIns="0" bIns="0" rtlCol="0" anchor="ctr"/>
+          <a:lstStyle/>
+          <a:p>
+            <a:pPr indent="0" marL="0">
+              <a:buNone/>
+            </a:pPr>
+            <a:r>
+              <a:rPr lang="en-US" sz="900" dirty="0">
+                <a:solidFill>
+                  <a:srgbClr val="64748B"/>
+                </a:solidFill>
+                <a:latin typeface="Calibri" pitchFamily="34" charset="0"/>
+                <a:ea typeface="Calibri" pitchFamily="34" charset="-122"/>
+                <a:cs typeface="Calibri" pitchFamily="34" charset="-120"/>
+              </a:rPr>
               <a:t>Software Security · Week 4</a:t>
             </a:r>
             <a:endParaRPr lang="en-US" sz="900" dirty="0"/>
@@ -7640,7 +7556,7 @@
       </p:sp>
       <p:pic>
         <p:nvPicPr>
-          <p:cNvPr id="8" name="Image 1" descr="/private/tmp/claude-501/-Users-pop7-Library-CloudStorage-OneDrive-MonsterConnectCo--Ltd-Lecture-KOSEN69---software-security/e6d6556f-17de-403d-a9a0-cf2f846149b4/scratchpad/pptx2/src/slides/pptx/assets/logo-small.png">    </p:cNvPr>
+          <p:cNvPr id="8" name="Image 1" descr="/private/tmp/claude-501/-Users-pop7-Library-CloudStorage-OneDrive-MonsterConnectCo--Ltd-Lecture-KOSEN69---software-security/e6d6556f-17de-403d-a9a0-cf2f846149b4/scratchpad/tree/slides/pptx/assets/logo-small.png">    </p:cNvPr>
           <p:cNvPicPr>
             <a:picLocks noChangeAspect="1"/>
           </p:cNvPicPr>
@@ -8266,7 +8182,7 @@
       </p:sp>
       <p:pic>
         <p:nvPicPr>
-          <p:cNvPr id="19" name="Image 1" descr="/private/tmp/claude-501/-Users-pop7-Library-CloudStorage-OneDrive-MonsterConnectCo--Ltd-Lecture-KOSEN69---software-security/e6d6556f-17de-403d-a9a0-cf2f846149b4/scratchpad/pptx2/src/slides/pptx/assets/logo-small.png">    </p:cNvPr>
+          <p:cNvPr id="19" name="Image 1" descr="/private/tmp/claude-501/-Users-pop7-Library-CloudStorage-OneDrive-MonsterConnectCo--Ltd-Lecture-KOSEN69---software-security/e6d6556f-17de-403d-a9a0-cf2f846149b4/scratchpad/tree/slides/pptx/assets/logo-small.png">    </p:cNvPr>
           <p:cNvPicPr>
             <a:picLocks noChangeAspect="1"/>
           </p:cNvPicPr>
@@ -8551,7 +8467,7 @@
       </p:sp>
       <p:pic>
         <p:nvPicPr>
-          <p:cNvPr id="9" name="Image 1" descr="/private/tmp/claude-501/-Users-pop7-Library-CloudStorage-OneDrive-MonsterConnectCo--Ltd-Lecture-KOSEN69---software-security/e6d6556f-17de-403d-a9a0-cf2f846149b4/scratchpad/pptx2/src/slides/pptx/assets/logo-small.png">    </p:cNvPr>
+          <p:cNvPr id="9" name="Image 1" descr="/private/tmp/claude-501/-Users-pop7-Library-CloudStorage-OneDrive-MonsterConnectCo--Ltd-Lecture-KOSEN69---software-security/e6d6556f-17de-403d-a9a0-cf2f846149b4/scratchpad/tree/slides/pptx/assets/logo-small.png">    </p:cNvPr>
           <p:cNvPicPr>
             <a:picLocks noChangeAspect="1"/>
           </p:cNvPicPr>
@@ -9167,7 +9083,7 @@
       </p:sp>
       <p:pic>
         <p:nvPicPr>
-          <p:cNvPr id="19" name="Image 1" descr="/private/tmp/claude-501/-Users-pop7-Library-CloudStorage-OneDrive-MonsterConnectCo--Ltd-Lecture-KOSEN69---software-security/e6d6556f-17de-403d-a9a0-cf2f846149b4/scratchpad/pptx2/src/slides/pptx/assets/logo-small.png">    </p:cNvPr>
+          <p:cNvPr id="19" name="Image 1" descr="/private/tmp/claude-501/-Users-pop7-Library-CloudStorage-OneDrive-MonsterConnectCo--Ltd-Lecture-KOSEN69---software-security/e6d6556f-17de-403d-a9a0-cf2f846149b4/scratchpad/tree/slides/pptx/assets/logo-small.png">    </p:cNvPr>
           <p:cNvPicPr>
             <a:picLocks noChangeAspect="1"/>
           </p:cNvPicPr>
@@ -9552,7 +9468,7 @@
       </p:sp>
       <p:pic>
         <p:nvPicPr>
-          <p:cNvPr id="12" name="Image 1" descr="/private/tmp/claude-501/-Users-pop7-Library-CloudStorage-OneDrive-MonsterConnectCo--Ltd-Lecture-KOSEN69---software-security/e6d6556f-17de-403d-a9a0-cf2f846149b4/scratchpad/pptx2/src/slides/pptx/assets/logo-small.png">    </p:cNvPr>
+          <p:cNvPr id="12" name="Image 1" descr="/private/tmp/claude-501/-Users-pop7-Library-CloudStorage-OneDrive-MonsterConnectCo--Ltd-Lecture-KOSEN69---software-security/e6d6556f-17de-403d-a9a0-cf2f846149b4/scratchpad/tree/slides/pptx/assets/logo-small.png">    </p:cNvPr>
           <p:cNvPicPr>
             <a:picLocks noChangeAspect="1"/>
           </p:cNvPicPr>
@@ -9874,7 +9790,7 @@
       </p:sp>
       <p:pic>
         <p:nvPicPr>
-          <p:cNvPr id="8" name="Image 1" descr="/private/tmp/claude-501/-Users-pop7-Library-CloudStorage-OneDrive-MonsterConnectCo--Ltd-Lecture-KOSEN69---software-security/e6d6556f-17de-403d-a9a0-cf2f846149b4/scratchpad/pptx2/src/slides/pptx/assets/logo-small.png">    </p:cNvPr>
+          <p:cNvPr id="8" name="Image 1" descr="/private/tmp/claude-501/-Users-pop7-Library-CloudStorage-OneDrive-MonsterConnectCo--Ltd-Lecture-KOSEN69---software-security/e6d6556f-17de-403d-a9a0-cf2f846149b4/scratchpad/tree/slides/pptx/assets/logo-small.png">    </p:cNvPr>
           <p:cNvPicPr>
             <a:picLocks noChangeAspect="1"/>
           </p:cNvPicPr>
@@ -10175,7 +10091,7 @@
       </p:sp>
       <p:pic>
         <p:nvPicPr>
-          <p:cNvPr id="8" name="Image 1" descr="/private/tmp/claude-501/-Users-pop7-Library-CloudStorage-OneDrive-MonsterConnectCo--Ltd-Lecture-KOSEN69---software-security/e6d6556f-17de-403d-a9a0-cf2f846149b4/scratchpad/pptx2/src/slides/pptx/assets/logo-small.png">    </p:cNvPr>
+          <p:cNvPr id="8" name="Image 1" descr="/private/tmp/claude-501/-Users-pop7-Library-CloudStorage-OneDrive-MonsterConnectCo--Ltd-Lecture-KOSEN69---software-security/e6d6556f-17de-403d-a9a0-cf2f846149b4/scratchpad/tree/slides/pptx/assets/logo-small.png">    </p:cNvPr>
           <p:cNvPicPr>
             <a:picLocks noChangeAspect="1"/>
           </p:cNvPicPr>
@@ -10309,7 +10225,7 @@
       </p:sp>
       <p:pic>
         <p:nvPicPr>
-          <p:cNvPr id="4" name="Image 0" descr="/private/tmp/claude-501/-Users-pop7-Library-CloudStorage-OneDrive-MonsterConnectCo--Ltd-Lecture-KOSEN69---software-security/e6d6556f-17de-403d-a9a0-cf2f846149b4/scratchpad/pptx2/src/slides/pptx/assets/logo-small.png">    </p:cNvPr>
+          <p:cNvPr id="4" name="Image 0" descr="/private/tmp/claude-501/-Users-pop7-Library-CloudStorage-OneDrive-MonsterConnectCo--Ltd-Lecture-KOSEN69---software-security/e6d6556f-17de-403d-a9a0-cf2f846149b4/scratchpad/tree/slides/pptx/assets/logo-small.png">    </p:cNvPr>
           <p:cNvPicPr>
             <a:picLocks noChangeAspect="1"/>
           </p:cNvPicPr>
@@ -10610,7 +10526,7 @@
       </p:sp>
       <p:pic>
         <p:nvPicPr>
-          <p:cNvPr id="8" name="Image 1" descr="/private/tmp/claude-501/-Users-pop7-Library-CloudStorage-OneDrive-MonsterConnectCo--Ltd-Lecture-KOSEN69---software-security/e6d6556f-17de-403d-a9a0-cf2f846149b4/scratchpad/pptx2/src/slides/pptx/assets/logo-small.png">    </p:cNvPr>
+          <p:cNvPr id="8" name="Image 1" descr="/private/tmp/claude-501/-Users-pop7-Library-CloudStorage-OneDrive-MonsterConnectCo--Ltd-Lecture-KOSEN69---software-security/e6d6556f-17de-403d-a9a0-cf2f846149b4/scratchpad/tree/slides/pptx/assets/logo-small.png">    </p:cNvPr>
           <p:cNvPicPr>
             <a:picLocks noChangeAspect="1"/>
           </p:cNvPicPr>
@@ -10974,7 +10890,7 @@
       </p:sp>
       <p:pic>
         <p:nvPicPr>
-          <p:cNvPr id="10" name="Image 1" descr="/private/tmp/claude-501/-Users-pop7-Library-CloudStorage-OneDrive-MonsterConnectCo--Ltd-Lecture-KOSEN69---software-security/e6d6556f-17de-403d-a9a0-cf2f846149b4/scratchpad/pptx2/src/slides/pptx/assets/logo-small.png">    </p:cNvPr>
+          <p:cNvPr id="10" name="Image 1" descr="/private/tmp/claude-501/-Users-pop7-Library-CloudStorage-OneDrive-MonsterConnectCo--Ltd-Lecture-KOSEN69---software-security/e6d6556f-17de-403d-a9a0-cf2f846149b4/scratchpad/tree/slides/pptx/assets/logo-small.png">    </p:cNvPr>
           <p:cNvPicPr>
             <a:picLocks noChangeAspect="1"/>
           </p:cNvPicPr>
@@ -11360,7 +11276,7 @@
       </p:sp>
       <p:pic>
         <p:nvPicPr>
-          <p:cNvPr id="10" name="Image 1" descr="/private/tmp/claude-501/-Users-pop7-Library-CloudStorage-OneDrive-MonsterConnectCo--Ltd-Lecture-KOSEN69---software-security/e6d6556f-17de-403d-a9a0-cf2f846149b4/scratchpad/pptx2/src/slides/pptx/assets/logo-small.png">    </p:cNvPr>
+          <p:cNvPr id="10" name="Image 1" descr="/private/tmp/claude-501/-Users-pop7-Library-CloudStorage-OneDrive-MonsterConnectCo--Ltd-Lecture-KOSEN69---software-security/e6d6556f-17de-403d-a9a0-cf2f846149b4/scratchpad/tree/slides/pptx/assets/logo-small.png">    </p:cNvPr>
           <p:cNvPicPr>
             <a:picLocks noChangeAspect="1"/>
           </p:cNvPicPr>
@@ -11603,7 +11519,7 @@
       </p:sp>
       <p:pic>
         <p:nvPicPr>
-          <p:cNvPr id="7" name="Image 1" descr="/private/tmp/claude-501/-Users-pop7-Library-CloudStorage-OneDrive-MonsterConnectCo--Ltd-Lecture-KOSEN69---software-security/e6d6556f-17de-403d-a9a0-cf2f846149b4/scratchpad/pptx2/src/slides/pptx/assets/logo-small.png">    </p:cNvPr>
+          <p:cNvPr id="7" name="Image 1" descr="/private/tmp/claude-501/-Users-pop7-Library-CloudStorage-OneDrive-MonsterConnectCo--Ltd-Lecture-KOSEN69---software-security/e6d6556f-17de-403d-a9a0-cf2f846149b4/scratchpad/tree/slides/pptx/assets/logo-small.png">    </p:cNvPr>
           <p:cNvPicPr>
             <a:picLocks noChangeAspect="1"/>
           </p:cNvPicPr>
@@ -12060,7 +11976,7 @@
       </p:sp>
       <p:pic>
         <p:nvPicPr>
-          <p:cNvPr id="13" name="Image 1" descr="/private/tmp/claude-501/-Users-pop7-Library-CloudStorage-OneDrive-MonsterConnectCo--Ltd-Lecture-KOSEN69---software-security/e6d6556f-17de-403d-a9a0-cf2f846149b4/scratchpad/pptx2/src/slides/pptx/assets/logo-small.png">    </p:cNvPr>
+          <p:cNvPr id="13" name="Image 1" descr="/private/tmp/claude-501/-Users-pop7-Library-CloudStorage-OneDrive-MonsterConnectCo--Ltd-Lecture-KOSEN69---software-security/e6d6556f-17de-403d-a9a0-cf2f846149b4/scratchpad/tree/slides/pptx/assets/logo-small.png">    </p:cNvPr>
           <p:cNvPicPr>
             <a:picLocks noChangeAspect="1"/>
           </p:cNvPicPr>
@@ -12319,7 +12235,7 @@
       </p:sp>
       <p:pic>
         <p:nvPicPr>
-          <p:cNvPr id="8" name="Image 1" descr="/private/tmp/claude-501/-Users-pop7-Library-CloudStorage-OneDrive-MonsterConnectCo--Ltd-Lecture-KOSEN69---software-security/e6d6556f-17de-403d-a9a0-cf2f846149b4/scratchpad/pptx2/src/slides/pptx/assets/logo-small.png">    </p:cNvPr>
+          <p:cNvPr id="8" name="Image 1" descr="/private/tmp/claude-501/-Users-pop7-Library-CloudStorage-OneDrive-MonsterConnectCo--Ltd-Lecture-KOSEN69---software-security/e6d6556f-17de-403d-a9a0-cf2f846149b4/scratchpad/tree/slides/pptx/assets/logo-small.png">    </p:cNvPr>
           <p:cNvPicPr>
             <a:picLocks noChangeAspect="1"/>
           </p:cNvPicPr>
@@ -12745,7 +12661,7 @@
       </p:sp>
       <p:pic>
         <p:nvPicPr>
-          <p:cNvPr id="10" name="Image 1" descr="/private/tmp/claude-501/-Users-pop7-Library-CloudStorage-OneDrive-MonsterConnectCo--Ltd-Lecture-KOSEN69---software-security/e6d6556f-17de-403d-a9a0-cf2f846149b4/scratchpad/pptx2/src/slides/pptx/assets/logo-small.png">    </p:cNvPr>
+          <p:cNvPr id="10" name="Image 1" descr="/private/tmp/claude-501/-Users-pop7-Library-CloudStorage-OneDrive-MonsterConnectCo--Ltd-Lecture-KOSEN69---software-security/e6d6556f-17de-403d-a9a0-cf2f846149b4/scratchpad/tree/slides/pptx/assets/logo-small.png">    </p:cNvPr>
           <p:cNvPicPr>
             <a:picLocks noChangeAspect="1"/>
           </p:cNvPicPr>
